--- a/docs/presentation/elevator-dispatch.pptx
+++ b/docs/presentation/elevator-dispatch.pptx
@@ -1660,10 +1660,8 @@
           <a:lstStyle/>
           <a:p>
             <a:r>
-              <a:rPr lang="en-US" dirty="0"/>
               <a:t>Before the demo and the numbers: why you should believe them. 192 tests at six levels — unit tests for every observable assumption, a structural no-peek-ahead test, property-based invariants over random buildings, golden statistics that now pin every committed result so a behaviour change forces a documentation change, end-to-end CLI checks, and a conformance matrix that runs the JavaScript port on all fifty scenario-by-variant combinations and asserts identical positions, events and car usage. Then an adversarial review of the whole repository: forty-one findings, no blockers, eight major; sixteen changed code or tests, twenty-one changed documents, four resolved otherwise. The review also re-drew every pattern with twenty fresh seeds — the headline held, two secondary claims did not. Sceptic’s question: two engines agreeing only proves they share the same bugs. Correct — conformance proves equality, not correctness; correctness comes from the unit and property tests and from a 400-seed fuzz, which broke no invariant.</a:t>
             </a:r>
-            <a:endParaRPr lang="en-US" dirty="0"/>
           </a:p>
         </p:txBody>
       </p:sp>
@@ -13331,7 +13329,7 @@
                 <a:ea typeface="Arial" pitchFamily="34" charset="-122"/>
                 <a:cs typeface="Arial" pitchFamily="34" charset="-120"/>
               </a:rPr>
-              <a:t>Adversarial review; twenty fresh seeds per pattern.</a:t>
+              <a:t>Two reviews by review passs of the same model; twenty fresh seeds per pattern.</a:t>
             </a:r>
             <a:endParaRPr lang="en-US" sz="1800" dirty="0"/>
           </a:p>
@@ -13372,7 +13370,7 @@
                 <a:ea typeface="Courier New" pitchFamily="34" charset="-122"/>
                 <a:cs typeface="Courier New" pitchFamily="34" charset="-120"/>
               </a:rPr>
-              <a:t>assistant</a:t>
+              <a:t>review passs, same model</a:t>
             </a:r>
             <a:endParaRPr lang="en-US" sz="1800" dirty="0"/>
           </a:p>

--- a/docs/presentation/elevator-dispatch.pptx
+++ b/docs/presentation/elevator-dispatch.pptx
@@ -780,10 +780,8 @@
           <a:lstStyle/>
           <a:p>
             <a:r>
-              <a:rPr lang="en-US" dirty="0"/>
-              <a:t>Waiting time says how the passengers fared; this says how the cars were used. A car is busy when it has someone aboard or someone assigned and still waiting. Three points. Smart dispatch does the same job with the least car-time — 62% busy in the morning peak against 89% and 95% — because fewer stops per trip is less travel per passenger; take turns keeps its cars busiest everywhere, which is waste, not throughput. But smart dispatch shares the work least evenly: one car in four carries 36% of the morning passengers where a fair share is 25%. And the fairness weight evens the cars as a side effect — 30 to 18 points in the morning, 21 to 5 at lunch, 33 to 10 on the tall lobby on the committed draws, and narrower in 11 to 15 of 20 fresh seeds on every pattern. One knob, two effects — it also raises the average wait in most seeds. Sceptic’s question: busy for a car that is travelling to a pickup — is that use or waste? It is work caused by the assignment, so it counts; that is the definition in A20, and a car driving to its parking floor is excluded.</a:t>
-            </a:r>
-            <a:endParaRPr lang="en-US" dirty="0"/>
+              <a:t>Waiting time says how the passengers fared; this says how the cars were used. A car is busy when it has someone aboard or someone assigned and still waiting. Three points. Smart dispatch does the same job with the least car-time — 62% busy in the morning peak against 89% and 95% — because it bundles people going the same way — 6.1 floors of car travel per passenger against 9.3 and 10.0 — and, the other side of bundling, its riders sit through more intermediate stops, 1.76 a trip against 1.21 and 0.95; "fewer stops" describes the car, not the rider; take turns keeps its cars busiest everywhere, which is waste, not throughput. But smart dispatch shares the work least evenly: one car in four carries 36% of the morning passengers where a fair share is 25%. And the fairness weight evens the cars as a side effect — 30 to 18 points in the morning, 21 to 5 at lunch, 33 to 10 on the tall lobby on the committed draws, and narrower in 11 to 15 of 20 fresh seeds on every pattern. One knob, two effects — it also raises the average wait in most seeds. Sceptic’s question: busy for a car that is travelling to a pickup — is that use or waste? It is work caused by the assignment, so it counts; that is the definition in A20, and a car driving to its parking floor is excluded.</a:t>
+            </a:r>
           </a:p>
         </p:txBody>
       </p:sp>
@@ -1396,10 +1394,8 @@
           <a:lstStyle/>
           <a:p>
             <a:r>
-              <a:rPr lang="en-US" dirty="0"/>
-              <a:t>The method is the point, not the tool. Seven phases. I framed the problem from the brief and answered the assistant’s four questions; together we fixed a plan that pinned every ambiguity and set working rules. Then research into how real controllers assign cars and what traffic looks like, the build with tests at every level, the measurement — comparison, charts, car usage, the browser simulator — an adversarial review including a twenty-seed robustness study, and the documentation and this deck. My part throughout: intent, scope, quality bar, every judgement call, review at each checkpoint. The assistant drafted, researched, built, tested and challenged, executing the plan autonomously. Time, honestly: two sessions on consecutive days, one to two hours of my attention on the first and two to three on the second, about six hours of wall-clock with the assistant doing the rest.</a:t>
-            </a:r>
-            <a:endParaRPr lang="en-US" dirty="0"/>
+              <a:t>The method is the point, not the tool. Seven phases. I framed the problem from the brief and answered the assistant’s four questions; together we fixed a plan that pinned every ambiguity and set working rules. Then research into how real controllers assign cars and what traffic looks like, the build with tests at every level, the measurement — comparison, charts, car usage, the browser simulator — an adversarial review including a twenty-seed robustness study, and the documentation and this deck. My part throughout: intent, scope, quality bar, every judgement call, review at each checkpoint. The assistant drafted, researched, built, tested and challenged, executing the plan autonomously. Time, honestly: two sessions on consecutive days, about six hours of my own attention — two on the first day framing and reviewing, four on the second steering the later phases — and three to four hours in which the assistant ran unsupervised.</a:t>
+            </a:r>
           </a:p>
         </p:txBody>
       </p:sp>
@@ -5772,7 +5768,7 @@
                 <a:ea typeface="Arial" pitchFamily="34" charset="-122"/>
                 <a:cs typeface="Arial" pitchFamily="34" charset="-120"/>
               </a:rPr>
-              <a:t>Cars busy in the morning peak; fewer stops per trip is less travel per passenger.</a:t>
+              <a:t>Cars busy in the morning peak. It bundles: 6.1 floors of car travel per passenger against 9.3 and 10.0 — and its riders sit through more stops, not fewer (1.76 a trip vs 1.21 and 0.95).</a:t>
             </a:r>
             <a:endParaRPr lang="en-US" sz="2100" dirty="0"/>
           </a:p>
@@ -13816,7 +13812,7 @@
                 <a:ea typeface="Arial" pitchFamily="34" charset="-122"/>
                 <a:cs typeface="Arial" pitchFamily="34" charset="-120"/>
               </a:rPr>
-              <a:t>two sessions on consecutive days — one to two hours of my attention on the first, two to three on the second; about six hours of wall-clock in the history, the assistant doing the rest.</a:t>
+              <a:t>two sessions on consecutive days — about two hours of my attention on the first, four on the second; the assistant ran unsupervised for a further three to four hours across the phases.</a:t>
             </a:r>
             <a:endParaRPr lang="en-US" sz="2100" dirty="0"/>
           </a:p>

--- a/docs/presentation/elevator-dispatch.pptx
+++ b/docs/presentation/elevator-dispatch.pptx
@@ -1928,7 +1928,7 @@
           <a:p>
             <a:r>
               <a:rPr lang="en-US" dirty="0"/>
-              <a:t>Before the demo and the numbers: why you should believe them. 225 tests at six levels — unit tests for every observable assumption, a structural no-peek-ahead test, property-based invariants over random buildings, golden statistics that pin every committed result, the five studies included, so a behaviour change forces a documentation change, end-to-end CLI checks, and a conformance matrix that runs the JavaScript port on all sixty-five scenario-by-variant combinations and asserts identical positions, events and car usage. Then an adversarial review of the whole repository: forty-one findings, no blockers, eight major; sixteen changed code or tests, twenty-one changed documents, four resolved otherwise. The review also re-drew every pattern with twenty fresh seeds — the headline held, two secondary claims did not. Sceptic’s question: two engines agreeing only proves they share the same bugs. Correct — conformance proves equality, not correctness; correctness comes from the unit and property tests and from a 400-seed fuzz, which broke no invariant.</a:t>
+              <a:t>Before the demo and the numbers: why you should believe them. 228 tests at six levels — unit tests for every observable assumption, a structural no-peek-ahead test, property-based invariants over random buildings, golden statistics that pin every committed result, the five studies included, so a behaviour change forces a documentation change, end-to-end CLI checks, and a conformance matrix that runs the JavaScript port on all sixty-five scenario-by-variant combinations and asserts identical positions, events and car usage. Then an adversarial review of the whole repository: forty-one findings, no blockers, eight major; sixteen changed code or tests, twenty-one changed documents, four resolved otherwise. The review also re-drew every pattern with twenty fresh seeds — the headline held, two secondary claims did not. Sceptic’s question: two engines agreeing only proves they share the same bugs. Correct — conformance proves equality, not correctness; correctness comes from the unit and property tests and from a 400-seed fuzz, which broke no invariant. And the model was checked against theory: with one car and a lobby full of passengers, the engine's round-trip time matches the classical Barney and Al-Sharif formula within half a percent on six building sizes — and that formula is nowhere in the code. The same formula's handling capacity predicts exactly which of the seven patterns saturate.</a:t>
             </a:r>
             <a:endParaRPr lang="en-US" dirty="0"/>
           </a:p>
@@ -19562,7 +19562,7 @@
                 <a:ea typeface="Arial" pitchFamily="34" charset="-122"/>
                 <a:cs typeface="Arial" pitchFamily="34" charset="-120"/>
               </a:rPr>
-              <a:t>225</a:t>
+              <a:t>228</a:t>
             </a:r>
             <a:endParaRPr lang="en-US" sz="12600" dirty="0"/>
           </a:p>
@@ -20766,6 +20766,48 @@
       </p:sp>
       <p:sp>
         <p:nvSpPr>
+          <p:cNvPr id="30" name="Text 28 copy"/>
+          <p:cNvSpPr/>
+          <p:nvPr/>
+        </p:nvSpPr>
+        <p:spPr>
+          <a:xfrm>
+            <a:off x="12410108" y="7196956"/>
+            <a:ext cx="1050000" cy="731490"/>
+          </a:xfrm>
+          <a:prstGeom prst="rect">
+            <a:avLst/>
+          </a:prstGeom>
+          <a:noFill/>
+          <a:ln/>
+        </p:spPr>
+        <p:txBody>
+          <a:bodyPr wrap="square" lIns="25400" tIns="25400" rIns="25400" bIns="25400" rtlCol="0" anchor="t"/>
+          <a:lstStyle/>
+          <a:p>
+            <a:pPr algn="l" indent="0" marL="0">
+              <a:lnSpc>
+                <a:spcPct val="113750"/>
+              </a:lnSpc>
+              <a:buNone/>
+            </a:pPr>
+            <a:r>
+              <a:rPr lang="en-US" sz="2100" b="1" dirty="0">
+                <a:solidFill>
+                  <a:srgbClr val="1C1B19"/>
+                </a:solidFill>
+                <a:latin typeface="Courier New" pitchFamily="34" charset="0"/>
+                <a:ea typeface="Courier New" pitchFamily="34" charset="-122"/>
+                <a:cs typeface="Courier New" pitchFamily="34" charset="-120"/>
+              </a:rPr>
+              <a:t>0.4%</a:t>
+            </a:r>
+            <a:endParaRPr lang="en-US" sz="2100" dirty="0"/>
+          </a:p>
+        </p:txBody>
+      </p:sp>
+      <p:sp>
+        <p:nvSpPr>
           <p:cNvPr id="31" name="Text 29"/>
           <p:cNvSpPr/>
           <p:nvPr/>
@@ -20803,6 +20845,48 @@
                 <a:cs typeface="Arial" pitchFamily="34" charset="-120"/>
               </a:rPr>
               <a:t>fresh seeds per pattern — the headline held</a:t>
+            </a:r>
+            <a:endParaRPr lang="en-US" sz="2100" dirty="0"/>
+          </a:p>
+        </p:txBody>
+      </p:sp>
+      <p:sp>
+        <p:nvSpPr>
+          <p:cNvPr id="31" name="Text 29 copy"/>
+          <p:cNvSpPr/>
+          <p:nvPr/>
+        </p:nvSpPr>
+        <p:spPr>
+          <a:xfrm>
+            <a:off x="13249708" y="7196956"/>
+            <a:ext cx="4117159" cy="731490"/>
+          </a:xfrm>
+          <a:prstGeom prst="rect">
+            <a:avLst/>
+          </a:prstGeom>
+          <a:noFill/>
+          <a:ln/>
+        </p:spPr>
+        <p:txBody>
+          <a:bodyPr wrap="square" lIns="25400" tIns="25400" rIns="25400" bIns="25400" rtlCol="0" anchor="t"/>
+          <a:lstStyle/>
+          <a:p>
+            <a:pPr algn="l" indent="0" marL="0">
+              <a:lnSpc>
+                <a:spcPct val="112000"/>
+              </a:lnSpc>
+              <a:buNone/>
+            </a:pPr>
+            <a:r>
+              <a:rPr lang="en-US" sz="2100" dirty="0">
+                <a:solidFill>
+                  <a:srgbClr val="4C4A44"/>
+                </a:solidFill>
+                <a:latin typeface="Arial" pitchFamily="34" charset="0"/>
+                <a:ea typeface="Arial" pitchFamily="34" charset="-122"/>
+                <a:cs typeface="Arial" pitchFamily="34" charset="-120"/>
+              </a:rPr>
+              <a:t>gap to the textbook round-trip formula — the model checked against theory</a:t>
             </a:r>
             <a:endParaRPr lang="en-US" sz="2100" dirty="0"/>
           </a:p>
